--- a/ws02/class/3일차_1.pptx
+++ b/ws02/class/3일차_1.pptx
@@ -6338,7 +6338,7 @@
             </a:r>
             <a:r>
               <a:rPr lang="en-US" altLang="ko-KR" b="1" dirty="0"/>
-              <a:t>·</a:t>
+              <a:t/>
             </a:r>
             <a:r>
               <a:rPr lang="en-US" sz="2800" dirty="0" err="1">
@@ -9619,7 +9619,7 @@
                 <a:ea typeface="Calibri" pitchFamily="34" charset="-122"/>
                 <a:cs typeface="Calibri" pitchFamily="34" charset="-120"/>
               </a:rPr>
-              <a:t>— 가장 즉각적 위협</a:t>
+              <a:t>가장 즉각적 위협</a:t>
             </a:r>
             <a:endParaRPr lang="en-US" b="1" dirty="0"/>
           </a:p>
@@ -17542,7 +17542,7 @@
                 <a:ea typeface="Calibri" pitchFamily="34" charset="-122"/>
                 <a:cs typeface="Calibri" pitchFamily="34" charset="-120"/>
               </a:rPr>
-              <a:t>— 모델·데이터·API 목록화</a:t>
+              <a:t>모델·데이터·API 목록화</a:t>
             </a:r>
             <a:endParaRPr lang="en-US" sz="2400" dirty="0"/>
           </a:p>
@@ -17695,7 +17695,7 @@
                 <a:ea typeface="Calibri" pitchFamily="34" charset="-122"/>
                 <a:cs typeface="Calibri" pitchFamily="34" charset="-120"/>
               </a:rPr>
-              <a:t>— T01~T15 매핑</a:t>
+              <a:t>T01~T15 매핑</a:t>
             </a:r>
             <a:endParaRPr lang="en-US" sz="2400" dirty="0"/>
           </a:p>
@@ -17848,7 +17848,7 @@
                 <a:ea typeface="Calibri" pitchFamily="34" charset="-122"/>
                 <a:cs typeface="Calibri" pitchFamily="34" charset="-120"/>
               </a:rPr>
-              <a:t>— OWASP LLM01~10 점검</a:t>
+              <a:t>OWASP LLM01~10 점검</a:t>
             </a:r>
             <a:endParaRPr lang="en-US" sz="2400" dirty="0"/>
           </a:p>
@@ -18001,7 +18001,7 @@
                 <a:ea typeface="Calibri" pitchFamily="34" charset="-122"/>
                 <a:cs typeface="Calibri" pitchFamily="34" charset="-120"/>
               </a:rPr>
-              <a:t>— 영향도×발생가능성</a:t>
+              <a:t>영향도×발생가능성</a:t>
             </a:r>
             <a:endParaRPr lang="en-US" sz="2400" dirty="0"/>
           </a:p>
@@ -18335,7 +18335,7 @@
                 <a:ea typeface="Calibri" pitchFamily="34" charset="-122"/>
                 <a:cs typeface="Calibri" pitchFamily="34" charset="-120"/>
               </a:rPr>
-              <a:t>— 프롬프트 인젝션 탐지</a:t>
+              <a:t>프롬프트 인젝션 탐지</a:t>
             </a:r>
             <a:endParaRPr lang="en-US" sz="2400" dirty="0"/>
           </a:p>
@@ -18488,7 +18488,7 @@
                 <a:ea typeface="Calibri" pitchFamily="34" charset="-122"/>
                 <a:cs typeface="Calibri" pitchFamily="34" charset="-120"/>
               </a:rPr>
-              <a:t>— 예상 외 응답 패턴 추적</a:t>
+              <a:t>예상 외 응답 패턴 추적</a:t>
             </a:r>
             <a:endParaRPr lang="en-US" sz="2400" dirty="0"/>
           </a:p>
@@ -18641,7 +18641,7 @@
                 <a:ea typeface="Calibri" pitchFamily="34" charset="-122"/>
                 <a:cs typeface="Calibri" pitchFamily="34" charset="-120"/>
               </a:rPr>
-              <a:t>— 비정상 쿼리 패턴</a:t>
+              <a:t>비정상 쿼리 패턴</a:t>
             </a:r>
             <a:endParaRPr lang="en-US" sz="2400" dirty="0"/>
           </a:p>
@@ -18794,7 +18794,7 @@
                 <a:ea typeface="Calibri" pitchFamily="34" charset="-122"/>
                 <a:cs typeface="Calibri" pitchFamily="34" charset="-120"/>
               </a:rPr>
-              <a:t>— 신뢰도 임계값</a:t>
+              <a:t>신뢰도 임계값</a:t>
             </a:r>
             <a:endParaRPr lang="en-US" sz="2400" dirty="0"/>
           </a:p>
@@ -19128,7 +19128,7 @@
                 <a:ea typeface="Calibri" pitchFamily="34" charset="-122"/>
                 <a:cs typeface="Calibri" pitchFamily="34" charset="-120"/>
               </a:rPr>
-              <a:t>— 피해 확산 방지</a:t>
+              <a:t>피해 확산 방지</a:t>
             </a:r>
             <a:endParaRPr lang="en-US" sz="2400" dirty="0"/>
           </a:p>
@@ -19281,7 +19281,7 @@
                 <a:ea typeface="Calibri" pitchFamily="34" charset="-122"/>
                 <a:cs typeface="Calibri" pitchFamily="34" charset="-120"/>
               </a:rPr>
-              <a:t>— 학습 데이터·모델 파라미터 검토</a:t>
+              <a:t>학습 데이터·모델 파라미터 검토</a:t>
             </a:r>
             <a:endParaRPr lang="en-US" sz="2400" dirty="0"/>
           </a:p>
@@ -19434,7 +19434,7 @@
                 <a:ea typeface="Calibri" pitchFamily="34" charset="-122"/>
                 <a:cs typeface="Calibri" pitchFamily="34" charset="-120"/>
               </a:rPr>
-              <a:t>— 안전 버전 복구</a:t>
+              <a:t>안전 버전 복구</a:t>
             </a:r>
             <a:endParaRPr lang="en-US" sz="2400" dirty="0"/>
           </a:p>
@@ -19587,7 +19587,7 @@
                 <a:ea typeface="Calibri" pitchFamily="34" charset="-122"/>
                 <a:cs typeface="Calibri" pitchFamily="34" charset="-120"/>
               </a:rPr>
-              <a:t>— 위험 분석 피드백 반영</a:t>
+              <a:t>위험 분석 피드백 반영</a:t>
             </a:r>
             <a:endParaRPr lang="en-US" sz="2400" dirty="0"/>
           </a:p>
@@ -35659,7 +35659,7 @@
                 <a:ea typeface="Calibri" pitchFamily="34" charset="-122"/>
                 <a:cs typeface="Calibri" pitchFamily="34" charset="-120"/>
               </a:rPr>
-              <a:t>→ AI 보안 위협 분석으로 이어진 </a:t>
+              <a:t>→ AI 보안 위협 분석으로 이어진</a:t>
             </a:r>
             <a:r>
               <a:rPr lang="en-US" sz="3200" dirty="0" err="1">
@@ -38111,7 +38111,7 @@
                 <a:ea typeface="Arial" pitchFamily="34" charset="-122"/>
                 <a:cs typeface="Arial" pitchFamily="34" charset="-120"/>
               </a:rPr>
-              <a:t>   → 물리적·논리적 분리 (M17)</a:t>
+              <a:t>→ 물리적·논리적 분리 (M17)</a:t>
             </a:r>
             <a:endParaRPr lang="en-US" sz="2000" dirty="0"/>
           </a:p>
@@ -45433,7 +45433,7 @@
             </a:r>
             <a:r>
               <a:rPr lang="en-KR" sz="3200" dirty="0"/>
-              <a:t>·</a:t>
+              <a:t/>
             </a:r>
             <a:r>
               <a:rPr lang="ko-KR" altLang="en-US" sz="3000" b="1" dirty="0">
